--- a/tests/fixtures/format-neutral-decks/korean-structural.pptx
+++ b/tests/fixtures/format-neutral-decks/korean-structural.pptx
@@ -6,6 +6,11 @@
   </p:sldMasterIdLst>
   <p:sldIdLst>
     <p:sldId id="256" r:id="rId7"/>
+    <p:sldId id="257" r:id="rId8"/>
+    <p:sldId id="258" r:id="rId9"/>
+    <p:sldId id="259" r:id="rId10"/>
+    <p:sldId id="260" r:id="rId11"/>
+    <p:sldId id="261" r:id="rId12"/>
   </p:sldIdLst>
   <p:sldSz cx="9144000" cy="5143500" type="screen4x3"/>
   <p:notesSz cx="6858000" cy="9144000"/>
@@ -3104,8 +3109,8 @@
         </p:nvSpPr>
         <p:spPr>
           <a:xfrm>
-            <a:off x="914400" y="1371600"/>
-            <a:ext cx="7315200" cy="1143000"/>
+            <a:off x="762000" y="584200"/>
+            <a:ext cx="7620000" cy="406400"/>
           </a:xfrm>
           <a:prstGeom prst="rect">
             <a:avLst/>
@@ -3113,19 +3118,931 @@
           <a:noFill/>
         </p:spPr>
         <p:txBody>
-          <a:bodyPr wrap="none" anchor="ctr">
+          <a:bodyPr wrap="none">
             <a:spAutoFit/>
           </a:bodyPr>
           <a:lstStyle/>
           <a:p>
             <a:r>
-              <a:rPr sz="2800" b="1">
+              <a:rPr sz="2400">
                 <a:solidFill>
                   <a:srgbClr val="18181B"/>
                 </a:solidFill>
                 <a:latin typeface="Apple SD Gothic Neo"/>
               </a:rPr>
               <a:t>형식 중립 근거 자료 2026</a:t>
+            </a:r>
+          </a:p>
+        </p:txBody>
+      </p:sp>
+      <p:sp>
+        <p:nvSpPr>
+          <p:cNvPr id="3" name="TextBox 2"/>
+          <p:cNvSpPr txBox="1"/>
+          <p:nvPr/>
+        </p:nvSpPr>
+        <p:spPr>
+          <a:xfrm>
+            <a:off x="762000" y="1346200"/>
+            <a:ext cx="7620000" cy="279400"/>
+          </a:xfrm>
+          <a:prstGeom prst="rect">
+            <a:avLst/>
+          </a:prstGeom>
+          <a:noFill/>
+        </p:spPr>
+        <p:txBody>
+          <a:bodyPr wrap="none">
+            <a:spAutoFit/>
+          </a:bodyPr>
+          <a:lstStyle/>
+          <a:p>
+            <a:r>
+              <a:rPr sz="1400">
+                <a:solidFill>
+                  <a:srgbClr val="18181B"/>
+                </a:solidFill>
+                <a:latin typeface="Apple SD Gothic Neo"/>
+              </a:rPr>
+              <a:t>한빛유통 2026년 사업 전략 보고</a:t>
+            </a:r>
+          </a:p>
+        </p:txBody>
+      </p:sp>
+      <p:sp>
+        <p:nvSpPr>
+          <p:cNvPr id="4" name="TextBox 3"/>
+          <p:cNvSpPr txBox="1"/>
+          <p:nvPr/>
+        </p:nvSpPr>
+        <p:spPr>
+          <a:xfrm>
+            <a:off x="762000" y="1803400"/>
+            <a:ext cx="7620000" cy="279400"/>
+          </a:xfrm>
+          <a:prstGeom prst="rect">
+            <a:avLst/>
+          </a:prstGeom>
+          <a:noFill/>
+        </p:spPr>
+        <p:txBody>
+          <a:bodyPr wrap="none">
+            <a:spAutoFit/>
+          </a:bodyPr>
+          <a:lstStyle/>
+          <a:p>
+            <a:r>
+              <a:rPr sz="1400">
+                <a:solidFill>
+                  <a:srgbClr val="18181B"/>
+                </a:solidFill>
+                <a:latin typeface="Apple SD Gothic Neo"/>
+              </a:rPr>
+              <a:t>작성: 경영기획본부, 2026년 1월 15일</a:t>
+            </a:r>
+          </a:p>
+        </p:txBody>
+      </p:sp>
+    </p:spTree>
+  </p:cSld>
+  <p:clrMapOvr>
+    <a:masterClrMapping/>
+  </p:clrMapOvr>
+</p:sld>
+</file>
+
+<file path=ppt/slides/slide2.xml><?xml version="1.0" encoding="utf-8"?>
+<p:sld xmlns:a="http://schemas.openxmlformats.org/drawingml/2006/main" xmlns:p="http://schemas.openxmlformats.org/presentationml/2006/main" xmlns:r="http://schemas.openxmlformats.org/officeDocument/2006/relationships">
+  <p:cSld>
+    <p:bg>
+      <p:bgPr>
+        <a:solidFill>
+          <a:srgbClr val="FAFAFA"/>
+        </a:solidFill>
+        <a:effectLst/>
+      </p:bgPr>
+    </p:bg>
+    <p:spTree>
+      <p:nvGrpSpPr>
+        <p:cNvPr id="1" name=""/>
+        <p:cNvGrpSpPr/>
+        <p:nvPr/>
+      </p:nvGrpSpPr>
+      <p:grpSpPr/>
+      <p:sp>
+        <p:nvSpPr>
+          <p:cNvPr id="2" name="TextBox 1"/>
+          <p:cNvSpPr txBox="1"/>
+          <p:nvPr/>
+        </p:nvSpPr>
+        <p:spPr>
+          <a:xfrm>
+            <a:off x="762000" y="584200"/>
+            <a:ext cx="7620000" cy="406400"/>
+          </a:xfrm>
+          <a:prstGeom prst="rect">
+            <a:avLst/>
+          </a:prstGeom>
+          <a:noFill/>
+        </p:spPr>
+        <p:txBody>
+          <a:bodyPr wrap="none">
+            <a:spAutoFit/>
+          </a:bodyPr>
+          <a:lstStyle/>
+          <a:p>
+            <a:r>
+              <a:rPr sz="2400">
+                <a:solidFill>
+                  <a:srgbClr val="18181B"/>
+                </a:solidFill>
+                <a:latin typeface="Apple SD Gothic Neo"/>
+              </a:rPr>
+              <a:t>매출 실적 요약</a:t>
+            </a:r>
+          </a:p>
+        </p:txBody>
+      </p:sp>
+      <p:sp>
+        <p:nvSpPr>
+          <p:cNvPr id="3" name="TextBox 2"/>
+          <p:cNvSpPr txBox="1"/>
+          <p:nvPr/>
+        </p:nvSpPr>
+        <p:spPr>
+          <a:xfrm>
+            <a:off x="762000" y="1346200"/>
+            <a:ext cx="7620000" cy="279400"/>
+          </a:xfrm>
+          <a:prstGeom prst="rect">
+            <a:avLst/>
+          </a:prstGeom>
+          <a:noFill/>
+        </p:spPr>
+        <p:txBody>
+          <a:bodyPr wrap="none">
+            <a:spAutoFit/>
+          </a:bodyPr>
+          <a:lstStyle/>
+          <a:p>
+            <a:r>
+              <a:rPr sz="1400">
+                <a:solidFill>
+                  <a:srgbClr val="18181B"/>
+                </a:solidFill>
+                <a:latin typeface="Apple SD Gothic Neo"/>
+              </a:rPr>
+              <a:t>2025년 연간 매출은 482억 원으로 전년 대비 23% 증가했다.</a:t>
+            </a:r>
+          </a:p>
+        </p:txBody>
+      </p:sp>
+      <p:sp>
+        <p:nvSpPr>
+          <p:cNvPr id="4" name="TextBox 3"/>
+          <p:cNvSpPr txBox="1"/>
+          <p:nvPr/>
+        </p:nvSpPr>
+        <p:spPr>
+          <a:xfrm>
+            <a:off x="762000" y="1803400"/>
+            <a:ext cx="7620000" cy="279400"/>
+          </a:xfrm>
+          <a:prstGeom prst="rect">
+            <a:avLst/>
+          </a:prstGeom>
+          <a:noFill/>
+        </p:spPr>
+        <p:txBody>
+          <a:bodyPr wrap="none">
+            <a:spAutoFit/>
+          </a:bodyPr>
+          <a:lstStyle/>
+          <a:p>
+            <a:r>
+              <a:rPr sz="1400">
+                <a:solidFill>
+                  <a:srgbClr val="18181B"/>
+                </a:solidFill>
+                <a:latin typeface="Apple SD Gothic Neo"/>
+              </a:rPr>
+              <a:t>대면 판매 채널 매출은 217억 원이고 온라인 몰 매출은 265억 원이다.</a:t>
+            </a:r>
+          </a:p>
+        </p:txBody>
+      </p:sp>
+      <p:sp>
+        <p:nvSpPr>
+          <p:cNvPr id="5" name="TextBox 4"/>
+          <p:cNvSpPr txBox="1"/>
+          <p:nvPr/>
+        </p:nvSpPr>
+        <p:spPr>
+          <a:xfrm>
+            <a:off x="762000" y="2260600"/>
+            <a:ext cx="7620000" cy="279400"/>
+          </a:xfrm>
+          <a:prstGeom prst="rect">
+            <a:avLst/>
+          </a:prstGeom>
+          <a:noFill/>
+        </p:spPr>
+        <p:txBody>
+          <a:bodyPr wrap="none">
+            <a:spAutoFit/>
+          </a:bodyPr>
+          <a:lstStyle/>
+          <a:p>
+            <a:r>
+              <a:rPr sz="1400">
+                <a:solidFill>
+                  <a:srgbClr val="18181B"/>
+                </a:solidFill>
+                <a:latin typeface="Apple SD Gothic Neo"/>
+              </a:rPr>
+              <a:t>4분기 매출은 분기 사상 최대인 151억 원을 기록했다.</a:t>
+            </a:r>
+          </a:p>
+        </p:txBody>
+      </p:sp>
+    </p:spTree>
+  </p:cSld>
+  <p:clrMapOvr>
+    <a:masterClrMapping/>
+  </p:clrMapOvr>
+</p:sld>
+</file>
+
+<file path=ppt/slides/slide3.xml><?xml version="1.0" encoding="utf-8"?>
+<p:sld xmlns:a="http://schemas.openxmlformats.org/drawingml/2006/main" xmlns:p="http://schemas.openxmlformats.org/presentationml/2006/main" xmlns:r="http://schemas.openxmlformats.org/officeDocument/2006/relationships">
+  <p:cSld>
+    <p:bg>
+      <p:bgPr>
+        <a:solidFill>
+          <a:srgbClr val="FAFAFA"/>
+        </a:solidFill>
+        <a:effectLst/>
+      </p:bgPr>
+    </p:bg>
+    <p:spTree>
+      <p:nvGrpSpPr>
+        <p:cNvPr id="1" name=""/>
+        <p:cNvGrpSpPr/>
+        <p:nvPr/>
+      </p:nvGrpSpPr>
+      <p:grpSpPr/>
+      <p:sp>
+        <p:nvSpPr>
+          <p:cNvPr id="2" name="TextBox 1"/>
+          <p:cNvSpPr txBox="1"/>
+          <p:nvPr/>
+        </p:nvSpPr>
+        <p:spPr>
+          <a:xfrm>
+            <a:off x="762000" y="584200"/>
+            <a:ext cx="7620000" cy="406400"/>
+          </a:xfrm>
+          <a:prstGeom prst="rect">
+            <a:avLst/>
+          </a:prstGeom>
+          <a:noFill/>
+        </p:spPr>
+        <p:txBody>
+          <a:bodyPr wrap="none">
+            <a:spAutoFit/>
+          </a:bodyPr>
+          <a:lstStyle/>
+          <a:p>
+            <a:r>
+              <a:rPr sz="2400">
+                <a:solidFill>
+                  <a:srgbClr val="18181B"/>
+                </a:solidFill>
+                <a:latin typeface="Apple SD Gothic Neo"/>
+              </a:rPr>
+              <a:t>구독 사업 현황</a:t>
+            </a:r>
+          </a:p>
+        </p:txBody>
+      </p:sp>
+      <p:sp>
+        <p:nvSpPr>
+          <p:cNvPr id="3" name="TextBox 2"/>
+          <p:cNvSpPr txBox="1"/>
+          <p:nvPr/>
+        </p:nvSpPr>
+        <p:spPr>
+          <a:xfrm>
+            <a:off x="762000" y="1346200"/>
+            <a:ext cx="7620000" cy="279400"/>
+          </a:xfrm>
+          <a:prstGeom prst="rect">
+            <a:avLst/>
+          </a:prstGeom>
+          <a:noFill/>
+        </p:spPr>
+        <p:txBody>
+          <a:bodyPr wrap="none">
+            <a:spAutoFit/>
+          </a:bodyPr>
+          <a:lstStyle/>
+          <a:p>
+            <a:r>
+              <a:rPr sz="1400">
+                <a:solidFill>
+                  <a:srgbClr val="18181B"/>
+                </a:solidFill>
+                <a:latin typeface="Apple SD Gothic Neo"/>
+              </a:rPr>
+              <a:t>유료 구독자 수는 2025년 말 기준 12,400명이다.</a:t>
+            </a:r>
+          </a:p>
+        </p:txBody>
+      </p:sp>
+      <p:sp>
+        <p:nvSpPr>
+          <p:cNvPr id="4" name="TextBox 3"/>
+          <p:cNvSpPr txBox="1"/>
+          <p:nvPr/>
+        </p:nvSpPr>
+        <p:spPr>
+          <a:xfrm>
+            <a:off x="762000" y="1803400"/>
+            <a:ext cx="7620000" cy="279400"/>
+          </a:xfrm>
+          <a:prstGeom prst="rect">
+            <a:avLst/>
+          </a:prstGeom>
+          <a:noFill/>
+        </p:spPr>
+        <p:txBody>
+          <a:bodyPr wrap="none">
+            <a:spAutoFit/>
+          </a:bodyPr>
+          <a:lstStyle/>
+          <a:p>
+            <a:r>
+              <a:rPr sz="1400">
+                <a:solidFill>
+                  <a:srgbClr val="18181B"/>
+                </a:solidFill>
+                <a:latin typeface="Apple SD Gothic Neo"/>
+              </a:rPr>
+              <a:t>월 구독 객단가는 19,000원이고 연 구독 유지율은 78%다.</a:t>
+            </a:r>
+          </a:p>
+        </p:txBody>
+      </p:sp>
+      <p:sp>
+        <p:nvSpPr>
+          <p:cNvPr id="5" name="TextBox 4"/>
+          <p:cNvSpPr txBox="1"/>
+          <p:nvPr/>
+        </p:nvSpPr>
+        <p:spPr>
+          <a:xfrm>
+            <a:off x="762000" y="2260600"/>
+            <a:ext cx="7620000" cy="279400"/>
+          </a:xfrm>
+          <a:prstGeom prst="rect">
+            <a:avLst/>
+          </a:prstGeom>
+          <a:noFill/>
+        </p:spPr>
+        <p:txBody>
+          <a:bodyPr wrap="none">
+            <a:spAutoFit/>
+          </a:bodyPr>
+          <a:lstStyle/>
+          <a:p>
+            <a:r>
+              <a:rPr sz="1400">
+                <a:solidFill>
+                  <a:srgbClr val="18181B"/>
+                </a:solidFill>
+                <a:latin typeface="Apple SD Gothic Neo"/>
+              </a:rPr>
+              <a:t>2026년 말까지 구독자 20,000명 달성을 목표로 한다.</a:t>
+            </a:r>
+          </a:p>
+        </p:txBody>
+      </p:sp>
+    </p:spTree>
+  </p:cSld>
+  <p:clrMapOvr>
+    <a:masterClrMapping/>
+  </p:clrMapOvr>
+</p:sld>
+</file>
+
+<file path=ppt/slides/slide4.xml><?xml version="1.0" encoding="utf-8"?>
+<p:sld xmlns:a="http://schemas.openxmlformats.org/drawingml/2006/main" xmlns:p="http://schemas.openxmlformats.org/presentationml/2006/main" xmlns:r="http://schemas.openxmlformats.org/officeDocument/2006/relationships">
+  <p:cSld>
+    <p:bg>
+      <p:bgPr>
+        <a:solidFill>
+          <a:srgbClr val="FAFAFA"/>
+        </a:solidFill>
+        <a:effectLst/>
+      </p:bgPr>
+    </p:bg>
+    <p:spTree>
+      <p:nvGrpSpPr>
+        <p:cNvPr id="1" name=""/>
+        <p:cNvGrpSpPr/>
+        <p:nvPr/>
+      </p:nvGrpSpPr>
+      <p:grpSpPr/>
+      <p:sp>
+        <p:nvSpPr>
+          <p:cNvPr id="2" name="TextBox 1"/>
+          <p:cNvSpPr txBox="1"/>
+          <p:nvPr/>
+        </p:nvSpPr>
+        <p:spPr>
+          <a:xfrm>
+            <a:off x="762000" y="584200"/>
+            <a:ext cx="7620000" cy="406400"/>
+          </a:xfrm>
+          <a:prstGeom prst="rect">
+            <a:avLst/>
+          </a:prstGeom>
+          <a:noFill/>
+        </p:spPr>
+        <p:txBody>
+          <a:bodyPr wrap="none">
+            <a:spAutoFit/>
+          </a:bodyPr>
+          <a:lstStyle/>
+          <a:p>
+            <a:r>
+              <a:rPr sz="2400">
+                <a:solidFill>
+                  <a:srgbClr val="18181B"/>
+                </a:solidFill>
+                <a:latin typeface="Apple SD Gothic Neo"/>
+              </a:rPr>
+              <a:t>신규 상품 계획</a:t>
+            </a:r>
+          </a:p>
+        </p:txBody>
+      </p:sp>
+      <p:sp>
+        <p:nvSpPr>
+          <p:cNvPr id="3" name="TextBox 2"/>
+          <p:cNvSpPr txBox="1"/>
+          <p:nvPr/>
+        </p:nvSpPr>
+        <p:spPr>
+          <a:xfrm>
+            <a:off x="762000" y="1346200"/>
+            <a:ext cx="7620000" cy="279400"/>
+          </a:xfrm>
+          <a:prstGeom prst="rect">
+            <a:avLst/>
+          </a:prstGeom>
+          <a:noFill/>
+        </p:spPr>
+        <p:txBody>
+          <a:bodyPr wrap="none">
+            <a:spAutoFit/>
+          </a:bodyPr>
+          <a:lstStyle/>
+          <a:p>
+            <a:r>
+              <a:rPr sz="1400">
+                <a:solidFill>
+                  <a:srgbClr val="18181B"/>
+                </a:solidFill>
+                <a:latin typeface="Apple SD Gothic Neo"/>
+              </a:rPr>
+              <a:t>2026년 3월에 프리미엄 배송 상품 단비를 출시한다.</a:t>
+            </a:r>
+          </a:p>
+        </p:txBody>
+      </p:sp>
+      <p:sp>
+        <p:nvSpPr>
+          <p:cNvPr id="4" name="TextBox 3"/>
+          <p:cNvSpPr txBox="1"/>
+          <p:nvPr/>
+        </p:nvSpPr>
+        <p:spPr>
+          <a:xfrm>
+            <a:off x="762000" y="1803400"/>
+            <a:ext cx="7620000" cy="279400"/>
+          </a:xfrm>
+          <a:prstGeom prst="rect">
+            <a:avLst/>
+          </a:prstGeom>
+          <a:noFill/>
+        </p:spPr>
+        <p:txBody>
+          <a:bodyPr wrap="none">
+            <a:spAutoFit/>
+          </a:bodyPr>
+          <a:lstStyle/>
+          <a:p>
+            <a:r>
+              <a:rPr sz="1400">
+                <a:solidFill>
+                  <a:srgbClr val="18181B"/>
+                </a:solidFill>
+                <a:latin typeface="Apple SD Gothic Neo"/>
+              </a:rPr>
+              <a:t>단비는 서울과 부산 등 6개 권역에서 우선 운영한다.</a:t>
+            </a:r>
+          </a:p>
+        </p:txBody>
+      </p:sp>
+      <p:sp>
+        <p:nvSpPr>
+          <p:cNvPr id="5" name="TextBox 4"/>
+          <p:cNvSpPr txBox="1"/>
+          <p:nvPr/>
+        </p:nvSpPr>
+        <p:spPr>
+          <a:xfrm>
+            <a:off x="762000" y="2260600"/>
+            <a:ext cx="7620000" cy="279400"/>
+          </a:xfrm>
+          <a:prstGeom prst="rect">
+            <a:avLst/>
+          </a:prstGeom>
+          <a:noFill/>
+        </p:spPr>
+        <p:txBody>
+          <a:bodyPr wrap="none">
+            <a:spAutoFit/>
+          </a:bodyPr>
+          <a:lstStyle/>
+          <a:p>
+            <a:r>
+              <a:rPr sz="1400">
+                <a:solidFill>
+                  <a:srgbClr val="18181B"/>
+                </a:solidFill>
+                <a:latin typeface="Apple SD Gothic Neo"/>
+              </a:rPr>
+              <a:t>초기 투자는 85억 원이고 손익분기 도달 시점은 2028년으로 본다.</a:t>
+            </a:r>
+          </a:p>
+        </p:txBody>
+      </p:sp>
+    </p:spTree>
+  </p:cSld>
+  <p:clrMapOvr>
+    <a:masterClrMapping/>
+  </p:clrMapOvr>
+</p:sld>
+</file>
+
+<file path=ppt/slides/slide5.xml><?xml version="1.0" encoding="utf-8"?>
+<p:sld xmlns:a="http://schemas.openxmlformats.org/drawingml/2006/main" xmlns:p="http://schemas.openxmlformats.org/presentationml/2006/main" xmlns:r="http://schemas.openxmlformats.org/officeDocument/2006/relationships">
+  <p:cSld>
+    <p:bg>
+      <p:bgPr>
+        <a:solidFill>
+          <a:srgbClr val="FAFAFA"/>
+        </a:solidFill>
+        <a:effectLst/>
+      </p:bgPr>
+    </p:bg>
+    <p:spTree>
+      <p:nvGrpSpPr>
+        <p:cNvPr id="1" name=""/>
+        <p:cNvGrpSpPr/>
+        <p:nvPr/>
+      </p:nvGrpSpPr>
+      <p:grpSpPr/>
+      <p:sp>
+        <p:nvSpPr>
+          <p:cNvPr id="2" name="TextBox 1"/>
+          <p:cNvSpPr txBox="1"/>
+          <p:nvPr/>
+        </p:nvSpPr>
+        <p:spPr>
+          <a:xfrm>
+            <a:off x="762000" y="584200"/>
+            <a:ext cx="7620000" cy="406400"/>
+          </a:xfrm>
+          <a:prstGeom prst="rect">
+            <a:avLst/>
+          </a:prstGeom>
+          <a:noFill/>
+        </p:spPr>
+        <p:txBody>
+          <a:bodyPr wrap="none">
+            <a:spAutoFit/>
+          </a:bodyPr>
+          <a:lstStyle/>
+          <a:p>
+            <a:r>
+              <a:rPr sz="2400">
+                <a:solidFill>
+                  <a:srgbClr val="18181B"/>
+                </a:solidFill>
+                <a:latin typeface="Apple SD Gothic Neo"/>
+              </a:rPr>
+              <a:t>시장 환경과 경쟁</a:t>
+            </a:r>
+          </a:p>
+        </p:txBody>
+      </p:sp>
+      <p:sp>
+        <p:nvSpPr>
+          <p:cNvPr id="3" name="TextBox 2"/>
+          <p:cNvSpPr txBox="1"/>
+          <p:nvPr/>
+        </p:nvSpPr>
+        <p:spPr>
+          <a:xfrm>
+            <a:off x="762000" y="1346200"/>
+            <a:ext cx="7620000" cy="279400"/>
+          </a:xfrm>
+          <a:prstGeom prst="rect">
+            <a:avLst/>
+          </a:prstGeom>
+          <a:noFill/>
+        </p:spPr>
+        <p:txBody>
+          <a:bodyPr wrap="none">
+            <a:spAutoFit/>
+          </a:bodyPr>
+          <a:lstStyle/>
+          <a:p>
+            <a:r>
+              <a:rPr sz="1400">
+                <a:solidFill>
+                  <a:srgbClr val="18181B"/>
+                </a:solidFill>
+                <a:latin typeface="Apple SD Gothic Neo"/>
+              </a:rPr>
+              <a:t>국내 유통 시장의 온라인 비중은 2025년에 42.7%였다.</a:t>
+            </a:r>
+          </a:p>
+        </p:txBody>
+      </p:sp>
+      <p:sp>
+        <p:nvSpPr>
+          <p:cNvPr id="4" name="TextBox 3"/>
+          <p:cNvSpPr txBox="1"/>
+          <p:nvPr/>
+        </p:nvSpPr>
+        <p:spPr>
+          <a:xfrm>
+            <a:off x="762000" y="1803400"/>
+            <a:ext cx="7620000" cy="279400"/>
+          </a:xfrm>
+          <a:prstGeom prst="rect">
+            <a:avLst/>
+          </a:prstGeom>
+          <a:noFill/>
+        </p:spPr>
+        <p:txBody>
+          <a:bodyPr wrap="none">
+            <a:spAutoFit/>
+          </a:bodyPr>
+          <a:lstStyle/>
+          <a:p>
+            <a:r>
+              <a:rPr sz="1400">
+                <a:solidFill>
+                  <a:srgbClr val="18181B"/>
+                </a:solidFill>
+                <a:latin typeface="Apple SD Gothic Neo"/>
+              </a:rPr>
+              <a:t>경쟁사 모아마켓의 점유율은 18.2%로 업계 2위다.</a:t>
+            </a:r>
+          </a:p>
+        </p:txBody>
+      </p:sp>
+      <p:sp>
+        <p:nvSpPr>
+          <p:cNvPr id="5" name="TextBox 4"/>
+          <p:cNvSpPr txBox="1"/>
+          <p:nvPr/>
+        </p:nvSpPr>
+        <p:spPr>
+          <a:xfrm>
+            <a:off x="762000" y="2260600"/>
+            <a:ext cx="7620000" cy="279400"/>
+          </a:xfrm>
+          <a:prstGeom prst="rect">
+            <a:avLst/>
+          </a:prstGeom>
+          <a:noFill/>
+        </p:spPr>
+        <p:txBody>
+          <a:bodyPr wrap="none">
+            <a:spAutoFit/>
+          </a:bodyPr>
+          <a:lstStyle/>
+          <a:p>
+            <a:r>
+              <a:rPr sz="1400">
+                <a:solidFill>
+                  <a:srgbClr val="18181B"/>
+                </a:solidFill>
+                <a:latin typeface="Apple SD Gothic Neo"/>
+              </a:rPr>
+              <a:t>물류 인건비는 최근 3년간 연평균 9.6% 올랐다.</a:t>
+            </a:r>
+          </a:p>
+        </p:txBody>
+      </p:sp>
+    </p:spTree>
+  </p:cSld>
+  <p:clrMapOvr>
+    <a:masterClrMapping/>
+  </p:clrMapOvr>
+</p:sld>
+</file>
+
+<file path=ppt/slides/slide6.xml><?xml version="1.0" encoding="utf-8"?>
+<p:sld xmlns:a="http://schemas.openxmlformats.org/drawingml/2006/main" xmlns:p="http://schemas.openxmlformats.org/presentationml/2006/main" xmlns:r="http://schemas.openxmlformats.org/officeDocument/2006/relationships">
+  <p:cSld>
+    <p:bg>
+      <p:bgPr>
+        <a:solidFill>
+          <a:srgbClr val="FAFAFA"/>
+        </a:solidFill>
+        <a:effectLst/>
+      </p:bgPr>
+    </p:bg>
+    <p:spTree>
+      <p:nvGrpSpPr>
+        <p:cNvPr id="1" name=""/>
+        <p:cNvGrpSpPr/>
+        <p:nvPr/>
+      </p:nvGrpSpPr>
+      <p:grpSpPr/>
+      <p:sp>
+        <p:nvSpPr>
+          <p:cNvPr id="2" name="TextBox 1"/>
+          <p:cNvSpPr txBox="1"/>
+          <p:nvPr/>
+        </p:nvSpPr>
+        <p:spPr>
+          <a:xfrm>
+            <a:off x="762000" y="584200"/>
+            <a:ext cx="7620000" cy="406400"/>
+          </a:xfrm>
+          <a:prstGeom prst="rect">
+            <a:avLst/>
+          </a:prstGeom>
+          <a:noFill/>
+        </p:spPr>
+        <p:txBody>
+          <a:bodyPr wrap="none">
+            <a:spAutoFit/>
+          </a:bodyPr>
+          <a:lstStyle/>
+          <a:p>
+            <a:r>
+              <a:rPr sz="2400">
+                <a:solidFill>
+                  <a:srgbClr val="18181B"/>
+                </a:solidFill>
+                <a:latin typeface="Apple SD Gothic Neo"/>
+              </a:rPr>
+              <a:t>2026년 실행 계획</a:t>
+            </a:r>
+          </a:p>
+        </p:txBody>
+      </p:sp>
+      <p:sp>
+        <p:nvSpPr>
+          <p:cNvPr id="3" name="TextBox 2"/>
+          <p:cNvSpPr txBox="1"/>
+          <p:nvPr/>
+        </p:nvSpPr>
+        <p:spPr>
+          <a:xfrm>
+            <a:off x="762000" y="1346200"/>
+            <a:ext cx="7620000" cy="279400"/>
+          </a:xfrm>
+          <a:prstGeom prst="rect">
+            <a:avLst/>
+          </a:prstGeom>
+          <a:noFill/>
+        </p:spPr>
+        <p:txBody>
+          <a:bodyPr wrap="none">
+            <a:spAutoFit/>
+          </a:bodyPr>
+          <a:lstStyle/>
+          <a:p>
+            <a:r>
+              <a:rPr sz="1400">
+                <a:solidFill>
+                  <a:srgbClr val="18181B"/>
+                </a:solidFill>
+                <a:latin typeface="Apple SD Gothic Neo"/>
+              </a:rPr>
+              <a:t>1분기에 물류센터 자동화 로봇 12대를 도입한다.</a:t>
+            </a:r>
+          </a:p>
+        </p:txBody>
+      </p:sp>
+      <p:sp>
+        <p:nvSpPr>
+          <p:cNvPr id="4" name="TextBox 3"/>
+          <p:cNvSpPr txBox="1"/>
+          <p:nvPr/>
+        </p:nvSpPr>
+        <p:spPr>
+          <a:xfrm>
+            <a:off x="762000" y="1803400"/>
+            <a:ext cx="7620000" cy="279400"/>
+          </a:xfrm>
+          <a:prstGeom prst="rect">
+            <a:avLst/>
+          </a:prstGeom>
+          <a:noFill/>
+        </p:spPr>
+        <p:txBody>
+          <a:bodyPr wrap="none">
+            <a:spAutoFit/>
+          </a:bodyPr>
+          <a:lstStyle/>
+          <a:p>
+            <a:r>
+              <a:rPr sz="1400">
+                <a:solidFill>
+                  <a:srgbClr val="18181B"/>
+                </a:solidFill>
+                <a:latin typeface="Apple SD Gothic Neo"/>
+              </a:rPr>
+              <a:t>2분기에 충청권 신규 물류센터를 준공한다.</a:t>
+            </a:r>
+          </a:p>
+        </p:txBody>
+      </p:sp>
+      <p:sp>
+        <p:nvSpPr>
+          <p:cNvPr id="5" name="TextBox 4"/>
+          <p:cNvSpPr txBox="1"/>
+          <p:nvPr/>
+        </p:nvSpPr>
+        <p:spPr>
+          <a:xfrm>
+            <a:off x="762000" y="2260600"/>
+            <a:ext cx="7620000" cy="279400"/>
+          </a:xfrm>
+          <a:prstGeom prst="rect">
+            <a:avLst/>
+          </a:prstGeom>
+          <a:noFill/>
+        </p:spPr>
+        <p:txBody>
+          <a:bodyPr wrap="none">
+            <a:spAutoFit/>
+          </a:bodyPr>
+          <a:lstStyle/>
+          <a:p>
+            <a:r>
+              <a:rPr sz="1400">
+                <a:solidFill>
+                  <a:srgbClr val="18181B"/>
+                </a:solidFill>
+                <a:latin typeface="Apple SD Gothic Neo"/>
+              </a:rPr>
+              <a:t>3분기에 단비 권역을 12개로 확대하고 앱 3.0을 출시한다.</a:t>
+            </a:r>
+          </a:p>
+        </p:txBody>
+      </p:sp>
+      <p:sp>
+        <p:nvSpPr>
+          <p:cNvPr id="6" name="TextBox 5"/>
+          <p:cNvSpPr txBox="1"/>
+          <p:nvPr/>
+        </p:nvSpPr>
+        <p:spPr>
+          <a:xfrm>
+            <a:off x="762000" y="2717800"/>
+            <a:ext cx="7620000" cy="279400"/>
+          </a:xfrm>
+          <a:prstGeom prst="rect">
+            <a:avLst/>
+          </a:prstGeom>
+          <a:noFill/>
+        </p:spPr>
+        <p:txBody>
+          <a:bodyPr wrap="none">
+            <a:spAutoFit/>
+          </a:bodyPr>
+          <a:lstStyle/>
+          <a:p>
+            <a:r>
+              <a:rPr sz="1400">
+                <a:solidFill>
+                  <a:srgbClr val="18181B"/>
+                </a:solidFill>
+                <a:latin typeface="Apple SD Gothic Neo"/>
+              </a:rPr>
+              <a:t>연말까지 매출 610억 원과 영업이익률 8.5%를 달성한다.</a:t>
             </a:r>
           </a:p>
         </p:txBody>
